--- a/courses/learn_sta/module03-01-incremental-update/slides.pptx
+++ b/courses/learn_sta/module03-01-incremental-update/slides.pptx
@@ -16,6 +16,9 @@
     <p:sldId id="264" r:id="rId16"/>
     <p:sldId id="265" r:id="rId17"/>
     <p:sldId id="266" r:id="rId18"/>
+    <p:sldId id="267" r:id="rId19"/>
+    <p:sldId id="268" r:id="rId20"/>
+    <p:sldId id="269" r:id="rId21"/>
   </p:sldIdLst>
   <p:sldSz cx="12191695" cy="6858000" type="screen4x3"/>
   <p:notesSz cx="6858000" cy="9144000"/>
@@ -582,7 +585,7 @@
           <a:lstStyle/>
           <a:p>
             <a:r>
-              <a:t>Do not mix setup and hold required maps. Do not propagate before the graph is levelized. After an edit or exception, recompute—stale tags lie.</a:t>
+              <a:t>In the browser lab, open **incremental-update**. Load the starter, run the analysis once, and read the metrics panel. Orient yourself—challenge panel, canvas, Check—then mirror the same goldens in code.</a:t>
             </a:r>
           </a:p>
         </p:txBody>
@@ -652,6 +655,146 @@
           <a:lstStyle/>
           <a:p>
             <a:r>
+              <a:t>In the implement track, use `common/tiny_timing.json` with the helpers in `common/graph.py` and `common/propagate.py`. Run `python3 common/test_propagate.py` (and the timing-graph test) until the goldens print ok.</a:t>
+            </a:r>
+          </a:p>
+        </p:txBody>
+      </p:sp>
+      <p:sp>
+        <p:nvSpPr>
+          <p:cNvPr id="4" name="Slide Number Placeholder 3"/>
+          <p:cNvSpPr>
+            <a:spLocks noGrp="1"/>
+          </p:cNvSpPr>
+          <p:nvPr>
+            <p:ph type="sldNum" idx="5" sz="quarter"/>
+          </p:nvPr>
+        </p:nvSpPr>
+        <p:spPr/>
+      </p:sp>
+    </p:spTree>
+  </p:cSld>
+  <p:clrMapOvr>
+    <a:masterClrMapping/>
+  </p:clrMapOvr>
+</p:notes>
+</file>
+
+<file path=ppt/notesSlides/notesSlide12.xml><?xml version="1.0" encoding="utf-8"?>
+<p:notes xmlns:a="http://schemas.openxmlformats.org/drawingml/2006/main" xmlns:p="http://schemas.openxmlformats.org/presentationml/2006/main" xmlns:r="http://schemas.openxmlformats.org/officeDocument/2006/relationships">
+  <p:cSld>
+    <p:spTree>
+      <p:nvGrpSpPr>
+        <p:cNvPr id="1" name=""/>
+        <p:cNvGrpSpPr/>
+        <p:nvPr/>
+      </p:nvGrpSpPr>
+      <p:grpSpPr>
+        <a:xfrm>
+          <a:off x="0" y="0"/>
+          <a:ext cx="0" cy="0"/>
+          <a:chOff x="0" y="0"/>
+          <a:chExt cx="0" cy="0"/>
+        </a:xfrm>
+      </p:grpSpPr>
+      <p:sp>
+        <p:nvSpPr>
+          <p:cNvPr id="2" name="Slide Image Placeholder 1"/>
+          <p:cNvSpPr>
+            <a:spLocks noGrp="1"/>
+          </p:cNvSpPr>
+          <p:nvPr>
+            <p:ph type="sldImg" idx="2"/>
+          </p:nvPr>
+        </p:nvSpPr>
+        <p:spPr/>
+      </p:sp>
+      <p:sp>
+        <p:nvSpPr>
+          <p:cNvPr id="3" name="Notes Placeholder 2"/>
+          <p:cNvSpPr>
+            <a:spLocks noGrp="1"/>
+          </p:cNvSpPr>
+          <p:nvPr>
+            <p:ph type="body" idx="3" sz="quarter"/>
+          </p:nvPr>
+        </p:nvSpPr>
+        <p:spPr/>
+        <p:txBody>
+          <a:bodyPr/>
+          <a:lstStyle/>
+          <a:p>
+            <a:r>
+              <a:t>Do not mix setup and hold required maps. Do not propagate before the graph is levelized. After an edit or exception, recompute—stale tags lie.</a:t>
+            </a:r>
+          </a:p>
+        </p:txBody>
+      </p:sp>
+      <p:sp>
+        <p:nvSpPr>
+          <p:cNvPr id="4" name="Slide Number Placeholder 3"/>
+          <p:cNvSpPr>
+            <a:spLocks noGrp="1"/>
+          </p:cNvSpPr>
+          <p:nvPr>
+            <p:ph type="sldNum" idx="5" sz="quarter"/>
+          </p:nvPr>
+        </p:nvSpPr>
+        <p:spPr/>
+      </p:sp>
+    </p:spTree>
+  </p:cSld>
+  <p:clrMapOvr>
+    <a:masterClrMapping/>
+  </p:clrMapOvr>
+</p:notes>
+</file>
+
+<file path=ppt/notesSlides/notesSlide13.xml><?xml version="1.0" encoding="utf-8"?>
+<p:notes xmlns:a="http://schemas.openxmlformats.org/drawingml/2006/main" xmlns:p="http://schemas.openxmlformats.org/presentationml/2006/main" xmlns:r="http://schemas.openxmlformats.org/officeDocument/2006/relationships">
+  <p:cSld>
+    <p:spTree>
+      <p:nvGrpSpPr>
+        <p:cNvPr id="1" name=""/>
+        <p:cNvGrpSpPr/>
+        <p:nvPr/>
+      </p:nvGrpSpPr>
+      <p:grpSpPr>
+        <a:xfrm>
+          <a:off x="0" y="0"/>
+          <a:ext cx="0" cy="0"/>
+          <a:chOff x="0" y="0"/>
+          <a:chExt cx="0" cy="0"/>
+        </a:xfrm>
+      </p:grpSpPr>
+      <p:sp>
+        <p:nvSpPr>
+          <p:cNvPr id="2" name="Slide Image Placeholder 1"/>
+          <p:cNvSpPr>
+            <a:spLocks noGrp="1"/>
+          </p:cNvSpPr>
+          <p:nvPr>
+            <p:ph type="sldImg" idx="2"/>
+          </p:nvPr>
+        </p:nvSpPr>
+        <p:spPr/>
+      </p:sp>
+      <p:sp>
+        <p:nvSpPr>
+          <p:cNvPr id="3" name="Notes Placeholder 2"/>
+          <p:cNvSpPr>
+            <a:spLocks noGrp="1"/>
+          </p:cNvSpPr>
+          <p:nvPr>
+            <p:ph type="body" idx="3" sz="quarter"/>
+          </p:nvPr>
+        </p:nvSpPr>
+        <p:spPr/>
+        <p:txBody>
+          <a:bodyPr/>
+          <a:lstStyle/>
+          <a:p>
+            <a:r>
               <a:t>Finish the checklist on at least one track—preferably both. When your numbers match the goldens, take the quiz, then continue.</a:t>
             </a:r>
           </a:p>
@@ -725,12 +868,6 @@
               <a:t>Invalidated cone: u1/Y, u2/A, u2/Y, out. Clean: in, u1/A. ΔA(out)=+0.8. Keep these numbers handy—the browser challenges and Track A tests use the same instance.</a:t>
             </a:r>
           </a:p>
-          <a:p/>
-          <a:p>
-            <a:r>
-              <a:t>&lt;!-- algorithm-walkthrough --&gt;</a:t>
-            </a:r>
-          </a:p>
         </p:txBody>
       </p:sp>
       <p:sp>
@@ -798,7 +935,13 @@
           <a:lstStyle/>
           <a:p>
             <a:r>
-              <a:t>Base arrival at out is 3.2 with setup slack 6.8. Incremental update never starts from an empty graph—it starts from valid tags.</a:t>
+              <a:t>Incremental STA is cone invalidation plus selective recompute. After an arc delay edit, BFS the fanout from the arc’s sink, clear those arrivals, then refill in topo order.</a:t>
+            </a:r>
+          </a:p>
+          <a:p/>
+          <a:p>
+            <a:r>
+              <a:t>Open this module's examples file and find the Pseudocode section. That written sketch is what you implement on the implement track and what the browser challenges measure.</a:t>
             </a:r>
           </a:p>
         </p:txBody>
@@ -868,7 +1011,7 @@
           <a:lstStyle/>
           <a:p>
             <a:r>
-              <a:t>Bump the u1 cell arc from 1.2 to 2.0. Only the fanout cone of u1/Y can change—everything upstream of the edit stays put.</a:t>
+              <a:t>Bump the u1 cell delay from one point two to two. The golden cone is u1/Y, u2/A, u2/Y, and out. Arrival at out becomes four and setup slack six.</a:t>
             </a:r>
           </a:p>
         </p:txBody>
@@ -938,7 +1081,7 @@
           <a:lstStyle/>
           <a:p>
             <a:r>
-              <a:t>Mark u1/Y, u2/A, u2/Y, and out dirty. Do not touch in or u1/A—their arrivals are still valid.</a:t>
+              <a:t>Base arrival at out is 3.2 with setup slack 6.8. Incremental update never starts from an empty graph—it starts from valid tags.</a:t>
             </a:r>
           </a:p>
         </p:txBody>
@@ -1008,7 +1151,7 @@
           <a:lstStyle/>
           <a:p>
             <a:r>
-              <a:t>Replay topo order on dirty pins. Arrival at out becomes 4.0; setup slack drops to 6.0. Same answer as a full rebuild, less work.</a:t>
+              <a:t>Bump the u1 cell arc from 1.2 to 2.0. Only the fanout cone of u1/Y can change—everything upstream of the edit stays put.</a:t>
             </a:r>
           </a:p>
         </p:txBody>
@@ -1078,13 +1221,7 @@
           <a:lstStyle/>
           <a:p>
             <a:r>
-              <a:t>Place, CTS, and ECO change tiny regions millions of times. Full-chip rebuilds every edit would not finish. Cone invalidate-and-repair is the habit.</a:t>
-            </a:r>
-          </a:p>
-          <a:p/>
-          <a:p>
-            <a:r>
-              <a:t>&lt;!-- /algorithm-walkthrough --&gt;</a:t>
+              <a:t>Mark u1/Y, u2/A, u2/Y, and out dirty. Do not touch in or u1/A—their arrivals are still valid.</a:t>
             </a:r>
           </a:p>
         </p:txBody>
@@ -1154,7 +1291,7 @@
           <a:lstStyle/>
           <a:p>
             <a:r>
-              <a:t>In the browser lab, open **incremental-update**. Load the starter, run the analysis once, and read the metrics panel. Orient yourself—challenge panel, canvas, Check—then mirror the same goldens in code.</a:t>
+              <a:t>Replay topo order on dirty pins. Arrival at out becomes 4.0; setup slack drops to 6.0. Same answer as a full rebuild, less work.</a:t>
             </a:r>
           </a:p>
         </p:txBody>
@@ -1224,7 +1361,7 @@
           <a:lstStyle/>
           <a:p>
             <a:r>
-              <a:t>In the implement track, use `common/tiny_timing.json` with the helpers in `common/graph.py` and `common/propagate.py`. Run `python3 common/test_propagate.py` (and the timing-graph test) until the goldens print ok.</a:t>
+              <a:t>Place, CTS, and ECO change tiny regions millions of times. Full-chip rebuilds every edit would not finish. Cone invalidate-and-repair is the habit.</a:t>
             </a:r>
           </a:p>
         </p:txBody>
@@ -4382,21 +4519,45 @@
                 </a:solidFill>
                 <a:latin typeface="Calibri"/>
               </a:rPr>
-              <a:t>Pitfall</a:t>
-            </a:r>
-          </a:p>
-        </p:txBody>
-      </p:sp>
-      <p:sp>
-        <p:nvSpPr>
-          <p:cNvPr id="3" name="TextBox 2"/>
+              <a:t>Why timers insist on incremental</a:t>
+            </a:r>
+          </a:p>
+        </p:txBody>
+      </p:sp>
+      <p:pic>
+        <p:nvPicPr>
+          <p:cNvPr id="3" name="Picture 2" descr="05-why-incremental.png"/>
+          <p:cNvPicPr>
+            <a:picLocks noChangeAspect="1"/>
+          </p:cNvPicPr>
+          <p:nvPr/>
+        </p:nvPicPr>
+        <p:blipFill>
+          <a:blip r:embed="rId2"/>
+          <a:stretch>
+            <a:fillRect/>
+          </a:stretch>
+        </p:blipFill>
+        <p:spPr>
+          <a:xfrm>
+            <a:off x="548640" y="1143000"/>
+            <a:ext cx="9404113" cy="4572000"/>
+          </a:xfrm>
+          <a:prstGeom prst="rect">
+            <a:avLst/>
+          </a:prstGeom>
+        </p:spPr>
+      </p:pic>
+      <p:sp>
+        <p:nvSpPr>
+          <p:cNvPr id="4" name="TextBox 3"/>
           <p:cNvSpPr txBox="1"/>
           <p:nvPr/>
         </p:nvSpPr>
         <p:spPr>
           <a:xfrm>
-            <a:off x="548640" y="1234440"/>
-            <a:ext cx="11064240" cy="4937760"/>
+            <a:off x="548640" y="5897880"/>
+            <a:ext cx="11064240" cy="411480"/>
           </a:xfrm>
           <a:prstGeom prst="rect">
             <a:avLst/>
@@ -4409,76 +4570,26 @@
           </a:bodyPr>
           <a:lstStyle/>
           <a:p>
-            <a:pPr lvl="0" marL="457200" indent="-228600">
-              <a:buFont typeface="Calibri"/>
-              <a:spcAft>
-                <a:spcPts val="1000"/>
-              </a:spcAft>
-              <a:buSzPct val="100000"/>
-              <a:buChar char="•"/>
+            <a:pPr>
               <a:lnSpc>
                 <a:spcPts val="2200"/>
               </a:lnSpc>
             </a:pPr>
             <a:r>
-              <a:rPr sz="2000" b="0">
+              <a:rPr sz="1200" b="0">
                 <a:solidFill>
                   <a:srgbClr val="333333"/>
                 </a:solidFill>
                 <a:latin typeface="Calibri"/>
               </a:rPr>
-              <a:t>Do not mix setup and hold required maps</a:t>
-            </a:r>
-          </a:p>
-          <a:p>
-            <a:pPr lvl="0" marL="457200" indent="-228600">
-              <a:buFont typeface="Calibri"/>
-              <a:spcAft>
-                <a:spcPts val="1000"/>
-              </a:spcAft>
-              <a:buSzPct val="100000"/>
-              <a:buChar char="•"/>
-              <a:lnSpc>
-                <a:spcPts val="2200"/>
-              </a:lnSpc>
-            </a:pPr>
-            <a:r>
-              <a:rPr sz="2000" b="0">
-                <a:solidFill>
-                  <a:srgbClr val="333333"/>
-                </a:solidFill>
-                <a:latin typeface="Calibri"/>
-              </a:rPr>
-              <a:t>Do not propagate before the graph is levelized</a:t>
-            </a:r>
-          </a:p>
-          <a:p>
-            <a:pPr lvl="0" marL="457200" indent="-228600">
-              <a:buFont typeface="Calibri"/>
-              <a:spcAft>
-                <a:spcPts val="1000"/>
-              </a:spcAft>
-              <a:buSzPct val="100000"/>
-              <a:buChar char="•"/>
-              <a:lnSpc>
-                <a:spcPts val="2200"/>
-              </a:lnSpc>
-            </a:pPr>
-            <a:r>
-              <a:rPr sz="2000" b="0">
-                <a:solidFill>
-                  <a:srgbClr val="333333"/>
-                </a:solidFill>
-                <a:latin typeface="Calibri"/>
-              </a:rPr>
-              <a:t>After an edit or exception, recompute, stale tags lie</a:t>
-            </a:r>
-          </a:p>
-        </p:txBody>
-      </p:sp>
-      <p:sp>
-        <p:nvSpPr>
-          <p:cNvPr id="4" name="TextBox 3"/>
+              <a:t>Why timers insist on incremental</a:t>
+            </a:r>
+          </a:p>
+        </p:txBody>
+      </p:sp>
+      <p:sp>
+        <p:nvSpPr>
+          <p:cNvPr id="5" name="TextBox 4"/>
           <p:cNvSpPr txBox="1"/>
           <p:nvPr/>
         </p:nvSpPr>
@@ -4567,6 +4678,548 @@
                 </a:solidFill>
                 <a:latin typeface="Calibri"/>
               </a:rPr>
+              <a:t>Browser lab track</a:t>
+            </a:r>
+          </a:p>
+        </p:txBody>
+      </p:sp>
+      <p:sp>
+        <p:nvSpPr>
+          <p:cNvPr id="3" name="TextBox 2"/>
+          <p:cNvSpPr txBox="1"/>
+          <p:nvPr/>
+        </p:nvSpPr>
+        <p:spPr>
+          <a:xfrm>
+            <a:off x="548640" y="1234440"/>
+            <a:ext cx="11064240" cy="4937760"/>
+          </a:xfrm>
+          <a:prstGeom prst="rect">
+            <a:avLst/>
+          </a:prstGeom>
+          <a:noFill/>
+        </p:spPr>
+        <p:txBody>
+          <a:bodyPr wrap="square">
+            <a:noAutofit/>
+          </a:bodyPr>
+          <a:lstStyle/>
+          <a:p>
+            <a:pPr lvl="0" marL="457200" indent="-228600">
+              <a:buFont typeface="Calibri"/>
+              <a:spcAft>
+                <a:spcPts val="1000"/>
+              </a:spcAft>
+              <a:buSzPct val="100000"/>
+              <a:buChar char="•"/>
+              <a:lnSpc>
+                <a:spcPts val="2200"/>
+              </a:lnSpc>
+            </a:pPr>
+            <a:r>
+              <a:rPr sz="2000" b="0">
+                <a:solidFill>
+                  <a:srgbClr val="333333"/>
+                </a:solidFill>
+                <a:latin typeface="Calibri"/>
+              </a:rPr>
+              <a:t>In the browser lab, open </a:t>
+            </a:r>
+            <a:r>
+              <a:rPr sz="2000" b="1">
+                <a:solidFill>
+                  <a:srgbClr val="333333"/>
+                </a:solidFill>
+                <a:latin typeface="Calibri"/>
+              </a:rPr>
+              <a:t>incremental-update</a:t>
+            </a:r>
+          </a:p>
+          <a:p>
+            <a:pPr lvl="0" marL="457200" indent="-228600">
+              <a:buFont typeface="Calibri"/>
+              <a:spcAft>
+                <a:spcPts val="1000"/>
+              </a:spcAft>
+              <a:buSzPct val="100000"/>
+              <a:buChar char="•"/>
+              <a:lnSpc>
+                <a:spcPts val="2200"/>
+              </a:lnSpc>
+            </a:pPr>
+            <a:r>
+              <a:rPr sz="2000" b="0">
+                <a:solidFill>
+                  <a:srgbClr val="333333"/>
+                </a:solidFill>
+                <a:latin typeface="Calibri"/>
+              </a:rPr>
+              <a:t>Load the starter, run the analysis once, and read the metrics panel</a:t>
+            </a:r>
+          </a:p>
+          <a:p>
+            <a:pPr lvl="0" marL="457200" indent="-228600">
+              <a:buFont typeface="Calibri"/>
+              <a:spcAft>
+                <a:spcPts val="1000"/>
+              </a:spcAft>
+              <a:buSzPct val="100000"/>
+              <a:buChar char="•"/>
+              <a:lnSpc>
+                <a:spcPts val="2200"/>
+              </a:lnSpc>
+            </a:pPr>
+            <a:r>
+              <a:rPr sz="2000" b="0">
+                <a:solidFill>
+                  <a:srgbClr val="333333"/>
+                </a:solidFill>
+                <a:latin typeface="Calibri"/>
+              </a:rPr>
+              <a:t>Orient yourself, challenge panel, canvas, Check, then mirror the same goldens in code</a:t>
+            </a:r>
+          </a:p>
+        </p:txBody>
+      </p:sp>
+      <p:sp>
+        <p:nvSpPr>
+          <p:cNvPr id="4" name="TextBox 3"/>
+          <p:cNvSpPr txBox="1"/>
+          <p:nvPr/>
+        </p:nvSpPr>
+        <p:spPr>
+          <a:xfrm>
+            <a:off x="548640" y="6355080"/>
+            <a:ext cx="11064240" cy="320040"/>
+          </a:xfrm>
+          <a:prstGeom prst="rect">
+            <a:avLst/>
+          </a:prstGeom>
+          <a:noFill/>
+        </p:spPr>
+        <p:txBody>
+          <a:bodyPr wrap="square">
+            <a:noAutofit/>
+          </a:bodyPr>
+          <a:lstStyle/>
+          <a:p>
+            <a:pPr algn="r">
+              <a:lnSpc>
+                <a:spcPts val="2200"/>
+              </a:lnSpc>
+              <a:defRPr sz="1000" b="0">
+                <a:solidFill>
+                  <a:srgbClr val="666666"/>
+                </a:solidFill>
+                <a:latin typeface="Calibri"/>
+              </a:defRPr>
+            </a:pPr>
+            <a:r>
+              <a:t>learn_sta — 01 incremental update</a:t>
+            </a:r>
+          </a:p>
+        </p:txBody>
+      </p:sp>
+    </p:spTree>
+  </p:cSld>
+  <p:clrMapOvr>
+    <a:masterClrMapping/>
+  </p:clrMapOvr>
+</p:sld>
+</file>
+
+<file path=ppt/slides/slide12.xml><?xml version="1.0" encoding="utf-8"?>
+<p:sld xmlns:a="http://schemas.openxmlformats.org/drawingml/2006/main" xmlns:p="http://schemas.openxmlformats.org/presentationml/2006/main" xmlns:r="http://schemas.openxmlformats.org/officeDocument/2006/relationships">
+  <p:cSld>
+    <p:spTree>
+      <p:nvGrpSpPr>
+        <p:cNvPr id="1" name=""/>
+        <p:cNvGrpSpPr/>
+        <p:nvPr/>
+      </p:nvGrpSpPr>
+      <p:grpSpPr/>
+      <p:sp>
+        <p:nvSpPr>
+          <p:cNvPr id="2" name="TextBox 1"/>
+          <p:cNvSpPr txBox="1"/>
+          <p:nvPr/>
+        </p:nvSpPr>
+        <p:spPr>
+          <a:xfrm>
+            <a:off x="548640" y="411480"/>
+            <a:ext cx="11064240" cy="777240"/>
+          </a:xfrm>
+          <a:prstGeom prst="rect">
+            <a:avLst/>
+          </a:prstGeom>
+          <a:noFill/>
+        </p:spPr>
+        <p:txBody>
+          <a:bodyPr wrap="square">
+            <a:noAutofit/>
+          </a:bodyPr>
+          <a:lstStyle/>
+          <a:p>
+            <a:pPr>
+              <a:lnSpc>
+                <a:spcPts val="2200"/>
+              </a:lnSpc>
+            </a:pPr>
+            <a:r>
+              <a:rPr sz="2800" b="1">
+                <a:solidFill>
+                  <a:srgbClr val="1A1A2E"/>
+                </a:solidFill>
+                <a:latin typeface="Calibri"/>
+              </a:rPr>
+              <a:t>Implement track</a:t>
+            </a:r>
+          </a:p>
+        </p:txBody>
+      </p:sp>
+      <p:sp>
+        <p:nvSpPr>
+          <p:cNvPr id="3" name="TextBox 2"/>
+          <p:cNvSpPr txBox="1"/>
+          <p:nvPr/>
+        </p:nvSpPr>
+        <p:spPr>
+          <a:xfrm>
+            <a:off x="548640" y="1234440"/>
+            <a:ext cx="11064240" cy="4937760"/>
+          </a:xfrm>
+          <a:prstGeom prst="rect">
+            <a:avLst/>
+          </a:prstGeom>
+          <a:noFill/>
+        </p:spPr>
+        <p:txBody>
+          <a:bodyPr wrap="square">
+            <a:noAutofit/>
+          </a:bodyPr>
+          <a:lstStyle/>
+          <a:p>
+            <a:pPr lvl="0" marL="457200" indent="-228600">
+              <a:buFont typeface="Calibri"/>
+              <a:spcAft>
+                <a:spcPts val="1000"/>
+              </a:spcAft>
+              <a:buSzPct val="100000"/>
+              <a:buChar char="•"/>
+              <a:lnSpc>
+                <a:spcPts val="2200"/>
+              </a:lnSpc>
+            </a:pPr>
+            <a:r>
+              <a:rPr sz="2000" b="0">
+                <a:solidFill>
+                  <a:srgbClr val="333333"/>
+                </a:solidFill>
+                <a:latin typeface="Calibri"/>
+              </a:rPr>
+              <a:t>In the implement track</a:t>
+            </a:r>
+          </a:p>
+          <a:p>
+            <a:pPr lvl="0" marL="457200" indent="-228600">
+              <a:buFont typeface="Calibri"/>
+              <a:spcAft>
+                <a:spcPts val="1000"/>
+              </a:spcAft>
+              <a:buSzPct val="100000"/>
+              <a:buChar char="•"/>
+              <a:lnSpc>
+                <a:spcPts val="2200"/>
+              </a:lnSpc>
+            </a:pPr>
+            <a:r>
+              <a:rPr sz="2000" b="0">
+                <a:solidFill>
+                  <a:srgbClr val="333333"/>
+                </a:solidFill>
+                <a:latin typeface="Calibri"/>
+              </a:rPr>
+              <a:t>Run `python3 common/test_propagate.py` (and the timing-graph test) until the goldens print</a:t>
+            </a:r>
+          </a:p>
+        </p:txBody>
+      </p:sp>
+      <p:sp>
+        <p:nvSpPr>
+          <p:cNvPr id="4" name="TextBox 3"/>
+          <p:cNvSpPr txBox="1"/>
+          <p:nvPr/>
+        </p:nvSpPr>
+        <p:spPr>
+          <a:xfrm>
+            <a:off x="548640" y="6355080"/>
+            <a:ext cx="11064240" cy="320040"/>
+          </a:xfrm>
+          <a:prstGeom prst="rect">
+            <a:avLst/>
+          </a:prstGeom>
+          <a:noFill/>
+        </p:spPr>
+        <p:txBody>
+          <a:bodyPr wrap="square">
+            <a:noAutofit/>
+          </a:bodyPr>
+          <a:lstStyle/>
+          <a:p>
+            <a:pPr algn="r">
+              <a:lnSpc>
+                <a:spcPts val="2200"/>
+              </a:lnSpc>
+              <a:defRPr sz="1000" b="0">
+                <a:solidFill>
+                  <a:srgbClr val="666666"/>
+                </a:solidFill>
+                <a:latin typeface="Calibri"/>
+              </a:defRPr>
+            </a:pPr>
+            <a:r>
+              <a:t>learn_sta — 01 incremental update</a:t>
+            </a:r>
+          </a:p>
+        </p:txBody>
+      </p:sp>
+    </p:spTree>
+  </p:cSld>
+  <p:clrMapOvr>
+    <a:masterClrMapping/>
+  </p:clrMapOvr>
+</p:sld>
+</file>
+
+<file path=ppt/slides/slide13.xml><?xml version="1.0" encoding="utf-8"?>
+<p:sld xmlns:a="http://schemas.openxmlformats.org/drawingml/2006/main" xmlns:p="http://schemas.openxmlformats.org/presentationml/2006/main" xmlns:r="http://schemas.openxmlformats.org/officeDocument/2006/relationships">
+  <p:cSld>
+    <p:spTree>
+      <p:nvGrpSpPr>
+        <p:cNvPr id="1" name=""/>
+        <p:cNvGrpSpPr/>
+        <p:nvPr/>
+      </p:nvGrpSpPr>
+      <p:grpSpPr/>
+      <p:sp>
+        <p:nvSpPr>
+          <p:cNvPr id="2" name="TextBox 1"/>
+          <p:cNvSpPr txBox="1"/>
+          <p:nvPr/>
+        </p:nvSpPr>
+        <p:spPr>
+          <a:xfrm>
+            <a:off x="548640" y="411480"/>
+            <a:ext cx="11064240" cy="777240"/>
+          </a:xfrm>
+          <a:prstGeom prst="rect">
+            <a:avLst/>
+          </a:prstGeom>
+          <a:noFill/>
+        </p:spPr>
+        <p:txBody>
+          <a:bodyPr wrap="square">
+            <a:noAutofit/>
+          </a:bodyPr>
+          <a:lstStyle/>
+          <a:p>
+            <a:pPr>
+              <a:lnSpc>
+                <a:spcPts val="2200"/>
+              </a:lnSpc>
+            </a:pPr>
+            <a:r>
+              <a:rPr sz="2800" b="1">
+                <a:solidFill>
+                  <a:srgbClr val="1A1A2E"/>
+                </a:solidFill>
+                <a:latin typeface="Calibri"/>
+              </a:rPr>
+              <a:t>Pitfall</a:t>
+            </a:r>
+          </a:p>
+        </p:txBody>
+      </p:sp>
+      <p:sp>
+        <p:nvSpPr>
+          <p:cNvPr id="3" name="TextBox 2"/>
+          <p:cNvSpPr txBox="1"/>
+          <p:nvPr/>
+        </p:nvSpPr>
+        <p:spPr>
+          <a:xfrm>
+            <a:off x="548640" y="1234440"/>
+            <a:ext cx="11064240" cy="4937760"/>
+          </a:xfrm>
+          <a:prstGeom prst="rect">
+            <a:avLst/>
+          </a:prstGeom>
+          <a:noFill/>
+        </p:spPr>
+        <p:txBody>
+          <a:bodyPr wrap="square">
+            <a:noAutofit/>
+          </a:bodyPr>
+          <a:lstStyle/>
+          <a:p>
+            <a:pPr lvl="0" marL="457200" indent="-228600">
+              <a:buFont typeface="Calibri"/>
+              <a:spcAft>
+                <a:spcPts val="1000"/>
+              </a:spcAft>
+              <a:buSzPct val="100000"/>
+              <a:buChar char="•"/>
+              <a:lnSpc>
+                <a:spcPts val="2200"/>
+              </a:lnSpc>
+            </a:pPr>
+            <a:r>
+              <a:rPr sz="2000" b="0">
+                <a:solidFill>
+                  <a:srgbClr val="333333"/>
+                </a:solidFill>
+                <a:latin typeface="Calibri"/>
+              </a:rPr>
+              <a:t>Do not mix setup and hold required maps</a:t>
+            </a:r>
+          </a:p>
+          <a:p>
+            <a:pPr lvl="0" marL="457200" indent="-228600">
+              <a:buFont typeface="Calibri"/>
+              <a:spcAft>
+                <a:spcPts val="1000"/>
+              </a:spcAft>
+              <a:buSzPct val="100000"/>
+              <a:buChar char="•"/>
+              <a:lnSpc>
+                <a:spcPts val="2200"/>
+              </a:lnSpc>
+            </a:pPr>
+            <a:r>
+              <a:rPr sz="2000" b="0">
+                <a:solidFill>
+                  <a:srgbClr val="333333"/>
+                </a:solidFill>
+                <a:latin typeface="Calibri"/>
+              </a:rPr>
+              <a:t>Do not propagate before the graph is levelized</a:t>
+            </a:r>
+          </a:p>
+          <a:p>
+            <a:pPr lvl="0" marL="457200" indent="-228600">
+              <a:buFont typeface="Calibri"/>
+              <a:spcAft>
+                <a:spcPts val="1000"/>
+              </a:spcAft>
+              <a:buSzPct val="100000"/>
+              <a:buChar char="•"/>
+              <a:lnSpc>
+                <a:spcPts val="2200"/>
+              </a:lnSpc>
+            </a:pPr>
+            <a:r>
+              <a:rPr sz="2000" b="0">
+                <a:solidFill>
+                  <a:srgbClr val="333333"/>
+                </a:solidFill>
+                <a:latin typeface="Calibri"/>
+              </a:rPr>
+              <a:t>After an edit or exception, recompute, stale tags lie</a:t>
+            </a:r>
+          </a:p>
+        </p:txBody>
+      </p:sp>
+      <p:sp>
+        <p:nvSpPr>
+          <p:cNvPr id="4" name="TextBox 3"/>
+          <p:cNvSpPr txBox="1"/>
+          <p:nvPr/>
+        </p:nvSpPr>
+        <p:spPr>
+          <a:xfrm>
+            <a:off x="548640" y="6355080"/>
+            <a:ext cx="11064240" cy="320040"/>
+          </a:xfrm>
+          <a:prstGeom prst="rect">
+            <a:avLst/>
+          </a:prstGeom>
+          <a:noFill/>
+        </p:spPr>
+        <p:txBody>
+          <a:bodyPr wrap="square">
+            <a:noAutofit/>
+          </a:bodyPr>
+          <a:lstStyle/>
+          <a:p>
+            <a:pPr algn="r">
+              <a:lnSpc>
+                <a:spcPts val="2200"/>
+              </a:lnSpc>
+              <a:defRPr sz="1000" b="0">
+                <a:solidFill>
+                  <a:srgbClr val="666666"/>
+                </a:solidFill>
+                <a:latin typeface="Calibri"/>
+              </a:defRPr>
+            </a:pPr>
+            <a:r>
+              <a:t>learn_sta — 01 incremental update</a:t>
+            </a:r>
+          </a:p>
+        </p:txBody>
+      </p:sp>
+    </p:spTree>
+  </p:cSld>
+  <p:clrMapOvr>
+    <a:masterClrMapping/>
+  </p:clrMapOvr>
+</p:sld>
+</file>
+
+<file path=ppt/slides/slide14.xml><?xml version="1.0" encoding="utf-8"?>
+<p:sld xmlns:a="http://schemas.openxmlformats.org/drawingml/2006/main" xmlns:p="http://schemas.openxmlformats.org/presentationml/2006/main" xmlns:r="http://schemas.openxmlformats.org/officeDocument/2006/relationships">
+  <p:cSld>
+    <p:spTree>
+      <p:nvGrpSpPr>
+        <p:cNvPr id="1" name=""/>
+        <p:cNvGrpSpPr/>
+        <p:nvPr/>
+      </p:nvGrpSpPr>
+      <p:grpSpPr/>
+      <p:sp>
+        <p:nvSpPr>
+          <p:cNvPr id="2" name="TextBox 1"/>
+          <p:cNvSpPr txBox="1"/>
+          <p:nvPr/>
+        </p:nvSpPr>
+        <p:spPr>
+          <a:xfrm>
+            <a:off x="548640" y="411480"/>
+            <a:ext cx="11064240" cy="777240"/>
+          </a:xfrm>
+          <a:prstGeom prst="rect">
+            <a:avLst/>
+          </a:prstGeom>
+          <a:noFill/>
+        </p:spPr>
+        <p:txBody>
+          <a:bodyPr wrap="square">
+            <a:noAutofit/>
+          </a:bodyPr>
+          <a:lstStyle/>
+          <a:p>
+            <a:pPr>
+              <a:lnSpc>
+                <a:spcPts val="2200"/>
+              </a:lnSpc>
+            </a:pPr>
+            <a:r>
+              <a:rPr sz="2800" b="1">
+                <a:solidFill>
+                  <a:srgbClr val="1A1A2E"/>
+                </a:solidFill>
+                <a:latin typeface="Calibri"/>
+              </a:rPr>
               <a:t>Your turn</a:t>
             </a:r>
           </a:p>
@@ -4844,6 +5497,125 @@
               <a:t>Keep these numbers handy, the browser challenges and Track A tests use the same instance</a:t>
             </a:r>
           </a:p>
+        </p:txBody>
+      </p:sp>
+      <p:sp>
+        <p:nvSpPr>
+          <p:cNvPr id="4" name="TextBox 3"/>
+          <p:cNvSpPr txBox="1"/>
+          <p:nvPr/>
+        </p:nvSpPr>
+        <p:spPr>
+          <a:xfrm>
+            <a:off x="548640" y="6355080"/>
+            <a:ext cx="11064240" cy="320040"/>
+          </a:xfrm>
+          <a:prstGeom prst="rect">
+            <a:avLst/>
+          </a:prstGeom>
+          <a:noFill/>
+        </p:spPr>
+        <p:txBody>
+          <a:bodyPr wrap="square">
+            <a:noAutofit/>
+          </a:bodyPr>
+          <a:lstStyle/>
+          <a:p>
+            <a:pPr algn="r">
+              <a:lnSpc>
+                <a:spcPts val="2200"/>
+              </a:lnSpc>
+              <a:defRPr sz="1000" b="0">
+                <a:solidFill>
+                  <a:srgbClr val="666666"/>
+                </a:solidFill>
+                <a:latin typeface="Calibri"/>
+              </a:defRPr>
+            </a:pPr>
+            <a:r>
+              <a:t>learn_sta — 01 incremental update</a:t>
+            </a:r>
+          </a:p>
+        </p:txBody>
+      </p:sp>
+    </p:spTree>
+  </p:cSld>
+  <p:clrMapOvr>
+    <a:masterClrMapping/>
+  </p:clrMapOvr>
+</p:sld>
+</file>
+
+<file path=ppt/slides/slide3.xml><?xml version="1.0" encoding="utf-8"?>
+<p:sld xmlns:a="http://schemas.openxmlformats.org/drawingml/2006/main" xmlns:p="http://schemas.openxmlformats.org/presentationml/2006/main" xmlns:r="http://schemas.openxmlformats.org/officeDocument/2006/relationships">
+  <p:cSld>
+    <p:spTree>
+      <p:nvGrpSpPr>
+        <p:cNvPr id="1" name=""/>
+        <p:cNvGrpSpPr/>
+        <p:nvPr/>
+      </p:nvGrpSpPr>
+      <p:grpSpPr/>
+      <p:sp>
+        <p:nvSpPr>
+          <p:cNvPr id="2" name="TextBox 1"/>
+          <p:cNvSpPr txBox="1"/>
+          <p:nvPr/>
+        </p:nvSpPr>
+        <p:spPr>
+          <a:xfrm>
+            <a:off x="548640" y="411480"/>
+            <a:ext cx="11064240" cy="777240"/>
+          </a:xfrm>
+          <a:prstGeom prst="rect">
+            <a:avLst/>
+          </a:prstGeom>
+          <a:noFill/>
+        </p:spPr>
+        <p:txBody>
+          <a:bodyPr wrap="square">
+            <a:noAutofit/>
+          </a:bodyPr>
+          <a:lstStyle/>
+          <a:p>
+            <a:pPr>
+              <a:lnSpc>
+                <a:spcPts val="2200"/>
+              </a:lnSpc>
+            </a:pPr>
+            <a:r>
+              <a:rPr sz="2800" b="1">
+                <a:solidFill>
+                  <a:srgbClr val="1A1A2E"/>
+                </a:solidFill>
+                <a:latin typeface="Calibri"/>
+              </a:rPr>
+              <a:t>Pseudocode</a:t>
+            </a:r>
+          </a:p>
+        </p:txBody>
+      </p:sp>
+      <p:sp>
+        <p:nvSpPr>
+          <p:cNvPr id="3" name="TextBox 2"/>
+          <p:cNvSpPr txBox="1"/>
+          <p:nvPr/>
+        </p:nvSpPr>
+        <p:spPr>
+          <a:xfrm>
+            <a:off x="548640" y="1234440"/>
+            <a:ext cx="11064240" cy="4937760"/>
+          </a:xfrm>
+          <a:prstGeom prst="rect">
+            <a:avLst/>
+          </a:prstGeom>
+          <a:noFill/>
+        </p:spPr>
+        <p:txBody>
+          <a:bodyPr wrap="square">
+            <a:noAutofit/>
+          </a:bodyPr>
+          <a:lstStyle/>
           <a:p>
             <a:pPr lvl="0" marL="457200" indent="-228600">
               <a:buFont typeface="Calibri"/>
@@ -4863,7 +5635,73 @@
                 </a:solidFill>
                 <a:latin typeface="Calibri"/>
               </a:rPr>
-              <a:t>&lt;!-- algorithm-walkthrough --&gt;</a:t>
+              <a:t>Incremental STA is cone invalidation plus selective recompute</a:t>
+            </a:r>
+          </a:p>
+          <a:p>
+            <a:pPr lvl="0" marL="457200" indent="-228600">
+              <a:buFont typeface="Calibri"/>
+              <a:spcAft>
+                <a:spcPts val="1000"/>
+              </a:spcAft>
+              <a:buSzPct val="100000"/>
+              <a:buChar char="•"/>
+              <a:lnSpc>
+                <a:spcPts val="2200"/>
+              </a:lnSpc>
+            </a:pPr>
+            <a:r>
+              <a:rPr sz="2000" b="0">
+                <a:solidFill>
+                  <a:srgbClr val="333333"/>
+                </a:solidFill>
+                <a:latin typeface="Calibri"/>
+              </a:rPr>
+              <a:t>After an arc delay edit</a:t>
+            </a:r>
+          </a:p>
+          <a:p>
+            <a:pPr lvl="0" marL="457200" indent="-228600">
+              <a:buFont typeface="Calibri"/>
+              <a:spcAft>
+                <a:spcPts val="1000"/>
+              </a:spcAft>
+              <a:buSzPct val="100000"/>
+              <a:buChar char="•"/>
+              <a:lnSpc>
+                <a:spcPts val="2200"/>
+              </a:lnSpc>
+            </a:pPr>
+            <a:r>
+              <a:rPr sz="2000" b="0">
+                <a:solidFill>
+                  <a:srgbClr val="333333"/>
+                </a:solidFill>
+                <a:latin typeface="Calibri"/>
+              </a:rPr>
+              <a:t>Open this module's examples file and find the Pseudocode section</a:t>
+            </a:r>
+          </a:p>
+          <a:p>
+            <a:pPr lvl="0" marL="457200" indent="-228600">
+              <a:buFont typeface="Calibri"/>
+              <a:spcAft>
+                <a:spcPts val="1000"/>
+              </a:spcAft>
+              <a:buSzPct val="100000"/>
+              <a:buChar char="•"/>
+              <a:lnSpc>
+                <a:spcPts val="2200"/>
+              </a:lnSpc>
+            </a:pPr>
+            <a:r>
+              <a:rPr sz="2000" b="0">
+                <a:solidFill>
+                  <a:srgbClr val="333333"/>
+                </a:solidFill>
+                <a:latin typeface="Calibri"/>
+              </a:rPr>
+              <a:t>That written sketch is what you implement on the implement track and what the browser</a:t>
             </a:r>
           </a:p>
         </p:txBody>
@@ -4915,7 +5753,465 @@
 </p:sld>
 </file>
 
-<file path=ppt/slides/slide3.xml><?xml version="1.0" encoding="utf-8"?>
+<file path=ppt/slides/slide4.xml><?xml version="1.0" encoding="utf-8"?>
+<p:sld xmlns:a="http://schemas.openxmlformats.org/drawingml/2006/main" xmlns:p="http://schemas.openxmlformats.org/presentationml/2006/main" xmlns:r="http://schemas.openxmlformats.org/officeDocument/2006/relationships">
+  <p:cSld>
+    <p:spTree>
+      <p:nvGrpSpPr>
+        <p:cNvPr id="1" name=""/>
+        <p:cNvGrpSpPr/>
+        <p:nvPr/>
+      </p:nvGrpSpPr>
+      <p:grpSpPr/>
+      <p:sp>
+        <p:nvSpPr>
+          <p:cNvPr id="2" name="TextBox 1"/>
+          <p:cNvSpPr txBox="1"/>
+          <p:nvPr/>
+        </p:nvSpPr>
+        <p:spPr>
+          <a:xfrm>
+            <a:off x="548640" y="411480"/>
+            <a:ext cx="11064240" cy="777240"/>
+          </a:xfrm>
+          <a:prstGeom prst="rect">
+            <a:avLst/>
+          </a:prstGeom>
+          <a:noFill/>
+        </p:spPr>
+        <p:txBody>
+          <a:bodyPr wrap="square">
+            <a:noAutofit/>
+          </a:bodyPr>
+          <a:lstStyle/>
+          <a:p>
+            <a:pPr>
+              <a:lnSpc>
+                <a:spcPts val="2200"/>
+              </a:lnSpc>
+            </a:pPr>
+            <a:r>
+              <a:rPr sz="2800" b="1">
+                <a:solidFill>
+                  <a:srgbClr val="1A1A2E"/>
+                </a:solidFill>
+                <a:latin typeface="Calibri"/>
+              </a:rPr>
+              <a:t>Algorithm sketch</a:t>
+            </a:r>
+          </a:p>
+        </p:txBody>
+      </p:sp>
+      <p:sp>
+        <p:nvSpPr>
+          <p:cNvPr id="3" name="TextBox 2"/>
+          <p:cNvSpPr txBox="1"/>
+          <p:nvPr/>
+        </p:nvSpPr>
+        <p:spPr>
+          <a:xfrm>
+            <a:off x="548640" y="1234440"/>
+            <a:ext cx="11064240" cy="4937760"/>
+          </a:xfrm>
+          <a:prstGeom prst="rect">
+            <a:avLst/>
+          </a:prstGeom>
+          <a:noFill/>
+        </p:spPr>
+        <p:txBody>
+          <a:bodyPr wrap="square">
+            <a:noAutofit/>
+          </a:bodyPr>
+          <a:lstStyle/>
+          <a:p>
+            <a:pPr lvl="0" marL="457200" indent="-228600">
+              <a:buFont typeface="Calibri"/>
+              <a:spcAft>
+                <a:spcPts val="1000"/>
+              </a:spcAft>
+              <a:buSzPct val="100000"/>
+              <a:buChar char="•"/>
+              <a:lnSpc>
+                <a:spcPts val="2200"/>
+              </a:lnSpc>
+            </a:pPr>
+            <a:r>
+              <a:rPr sz="2000" b="0">
+                <a:solidFill>
+                  <a:srgbClr val="333333"/>
+                </a:solidFill>
+                <a:latin typeface="Calibri"/>
+              </a:rPr>
+              <a:t>Bump the u1 cell delay from one point two to two</a:t>
+            </a:r>
+          </a:p>
+          <a:p>
+            <a:pPr lvl="0" marL="457200" indent="-228600">
+              <a:buFont typeface="Calibri"/>
+              <a:spcAft>
+                <a:spcPts val="1000"/>
+              </a:spcAft>
+              <a:buSzPct val="100000"/>
+              <a:buChar char="•"/>
+              <a:lnSpc>
+                <a:spcPts val="2200"/>
+              </a:lnSpc>
+            </a:pPr>
+            <a:r>
+              <a:rPr sz="2000" b="0">
+                <a:solidFill>
+                  <a:srgbClr val="333333"/>
+                </a:solidFill>
+                <a:latin typeface="Calibri"/>
+              </a:rPr>
+              <a:t>The golden cone is u1/Y, u2/A, u2/Y, and out</a:t>
+            </a:r>
+          </a:p>
+          <a:p>
+            <a:pPr lvl="0" marL="457200" indent="-228600">
+              <a:buFont typeface="Calibri"/>
+              <a:spcAft>
+                <a:spcPts val="1000"/>
+              </a:spcAft>
+              <a:buSzPct val="100000"/>
+              <a:buChar char="•"/>
+              <a:lnSpc>
+                <a:spcPts val="2200"/>
+              </a:lnSpc>
+            </a:pPr>
+            <a:r>
+              <a:rPr sz="2000" b="0">
+                <a:solidFill>
+                  <a:srgbClr val="333333"/>
+                </a:solidFill>
+                <a:latin typeface="Calibri"/>
+              </a:rPr>
+              <a:t>Arrival at out becomes four and setup slack six</a:t>
+            </a:r>
+          </a:p>
+        </p:txBody>
+      </p:sp>
+      <p:sp>
+        <p:nvSpPr>
+          <p:cNvPr id="4" name="TextBox 3"/>
+          <p:cNvSpPr txBox="1"/>
+          <p:nvPr/>
+        </p:nvSpPr>
+        <p:spPr>
+          <a:xfrm>
+            <a:off x="548640" y="6355080"/>
+            <a:ext cx="11064240" cy="320040"/>
+          </a:xfrm>
+          <a:prstGeom prst="rect">
+            <a:avLst/>
+          </a:prstGeom>
+          <a:noFill/>
+        </p:spPr>
+        <p:txBody>
+          <a:bodyPr wrap="square">
+            <a:noAutofit/>
+          </a:bodyPr>
+          <a:lstStyle/>
+          <a:p>
+            <a:pPr algn="r">
+              <a:lnSpc>
+                <a:spcPts val="2200"/>
+              </a:lnSpc>
+              <a:defRPr sz="1000" b="0">
+                <a:solidFill>
+                  <a:srgbClr val="666666"/>
+                </a:solidFill>
+                <a:latin typeface="Calibri"/>
+              </a:defRPr>
+            </a:pPr>
+            <a:r>
+              <a:t>learn_sta — 01 incremental update</a:t>
+            </a:r>
+          </a:p>
+        </p:txBody>
+      </p:sp>
+    </p:spTree>
+  </p:cSld>
+  <p:clrMapOvr>
+    <a:masterClrMapping/>
+  </p:clrMapOvr>
+</p:sld>
+</file>
+
+<file path=ppt/slides/slide5.xml><?xml version="1.0" encoding="utf-8"?>
+<p:sld xmlns:a="http://schemas.openxmlformats.org/drawingml/2006/main" xmlns:p="http://schemas.openxmlformats.org/presentationml/2006/main" xmlns:r="http://schemas.openxmlformats.org/officeDocument/2006/relationships">
+  <p:cSld>
+    <p:spTree>
+      <p:nvGrpSpPr>
+        <p:cNvPr id="1" name=""/>
+        <p:cNvGrpSpPr/>
+        <p:nvPr/>
+      </p:nvGrpSpPr>
+      <p:grpSpPr/>
+      <p:sp>
+        <p:nvSpPr>
+          <p:cNvPr id="2" name="TextBox 1"/>
+          <p:cNvSpPr txBox="1"/>
+          <p:nvPr/>
+        </p:nvSpPr>
+        <p:spPr>
+          <a:xfrm>
+            <a:off x="548640" y="411480"/>
+            <a:ext cx="11064240" cy="777240"/>
+          </a:xfrm>
+          <a:prstGeom prst="rect">
+            <a:avLst/>
+          </a:prstGeom>
+          <a:noFill/>
+        </p:spPr>
+        <p:txBody>
+          <a:bodyPr wrap="square">
+            <a:noAutofit/>
+          </a:bodyPr>
+          <a:lstStyle/>
+          <a:p>
+            <a:pPr>
+              <a:lnSpc>
+                <a:spcPts val="2200"/>
+              </a:lnSpc>
+            </a:pPr>
+            <a:r>
+              <a:rPr sz="2800" b="1">
+                <a:solidFill>
+                  <a:srgbClr val="1A1A2E"/>
+                </a:solidFill>
+                <a:latin typeface="Calibri"/>
+              </a:rPr>
+              <a:t>Algorithm sketch — try these</a:t>
+            </a:r>
+          </a:p>
+        </p:txBody>
+      </p:sp>
+      <p:sp>
+        <p:nvSpPr>
+          <p:cNvPr id="3" name="TextBox 2"/>
+          <p:cNvSpPr txBox="1"/>
+          <p:nvPr/>
+        </p:nvSpPr>
+        <p:spPr>
+          <a:xfrm>
+            <a:off x="548640" y="1143000"/>
+            <a:ext cx="11064240" cy="5029200"/>
+          </a:xfrm>
+          <a:prstGeom prst="rect">
+            <a:avLst/>
+          </a:prstGeom>
+          <a:solidFill>
+            <a:srgbClr val="F4F4F4"/>
+          </a:solidFill>
+        </p:spPr>
+        <p:txBody>
+          <a:bodyPr wrap="square">
+            <a:noAutofit/>
+          </a:bodyPr>
+          <a:lstStyle/>
+          <a:p>
+            <a:pPr>
+              <a:lnSpc>
+                <a:spcPts val="2200"/>
+              </a:lnSpc>
+              <a:spcAft>
+                <a:spcPts val="400"/>
+              </a:spcAft>
+            </a:pPr>
+            <a:r>
+              <a:rPr sz="2000" b="0">
+                <a:solidFill>
+                  <a:srgbClr val="333333"/>
+                </a:solidFill>
+                <a:latin typeface="Consolas"/>
+              </a:rPr>
+              <a:t>INPUT: G, edit u→v delay:=d', A_old</a:t>
+            </a:r>
+          </a:p>
+          <a:p>
+            <a:pPr>
+              <a:lnSpc>
+                <a:spcPts val="2200"/>
+              </a:lnSpc>
+              <a:spcAft>
+                <a:spcPts val="400"/>
+              </a:spcAft>
+            </a:pPr>
+            <a:r>
+              <a:rPr sz="2000" b="0">
+                <a:solidFill>
+                  <a:srgbClr val="333333"/>
+                </a:solidFill>
+                <a:latin typeface="Consolas"/>
+              </a:rPr>
+              <a:t>OUTPUT: A_new, invalidated cone</a:t>
+            </a:r>
+          </a:p>
+          <a:p>
+            <a:pPr>
+              <a:lnSpc>
+                <a:spcPts val="2200"/>
+              </a:lnSpc>
+              <a:spcAft>
+                <a:spcPts val="400"/>
+              </a:spcAft>
+            </a:pPr>
+            <a:r>
+              <a:rPr sz="2000" b="0">
+                <a:solidFill>
+                  <a:srgbClr val="333333"/>
+                </a:solidFill>
+                <a:latin typeface="Consolas"/>
+              </a:rPr>
+              <a:t>set delay(u,v)←d'</a:t>
+            </a:r>
+          </a:p>
+          <a:p>
+            <a:pPr>
+              <a:lnSpc>
+                <a:spcPts val="2200"/>
+              </a:lnSpc>
+              <a:spcAft>
+                <a:spcPts val="400"/>
+              </a:spcAft>
+            </a:pPr>
+            <a:r>
+              <a:rPr sz="2000" b="0">
+                <a:solidFill>
+                  <a:srgbClr val="333333"/>
+                </a:solidFill>
+                <a:latin typeface="Consolas"/>
+              </a:rPr>
+              <a:t>inv ← BFS successors from v (incl. v)</a:t>
+            </a:r>
+          </a:p>
+          <a:p>
+            <a:pPr>
+              <a:lnSpc>
+                <a:spcPts val="2200"/>
+              </a:lnSpc>
+              <a:spcAft>
+                <a:spcPts val="400"/>
+              </a:spcAft>
+            </a:pPr>
+            <a:r>
+              <a:rPr sz="2000" b="0">
+                <a:solidFill>
+                  <a:srgbClr val="333333"/>
+                </a:solidFill>
+                <a:latin typeface="Consolas"/>
+              </a:rPr>
+              <a:t>delete A[p] for p in inv</a:t>
+            </a:r>
+          </a:p>
+          <a:p>
+            <a:pPr>
+              <a:lnSpc>
+                <a:spcPts val="2200"/>
+              </a:lnSpc>
+              <a:spcAft>
+                <a:spcPts val="400"/>
+              </a:spcAft>
+            </a:pPr>
+            <a:r>
+              <a:rPr sz="2000" b="0">
+                <a:solidFill>
+                  <a:srgbClr val="333333"/>
+                </a:solidFill>
+                <a:latin typeface="Consolas"/>
+              </a:rPr>
+              <a:t>recompute A in topo order for missing pins</a:t>
+            </a:r>
+          </a:p>
+          <a:p>
+            <a:pPr>
+              <a:lnSpc>
+                <a:spcPts val="2200"/>
+              </a:lnSpc>
+              <a:spcAft>
+                <a:spcPts val="400"/>
+              </a:spcAft>
+            </a:pPr>
+            <a:r>
+              <a:rPr sz="2000" b="0">
+                <a:solidFill>
+                  <a:srgbClr val="333333"/>
+                </a:solidFill>
+                <a:latin typeface="Consolas"/>
+              </a:rPr>
+              <a:t>GOLDEN edit 1.2→2.0 on u1 cell:</a:t>
+            </a:r>
+          </a:p>
+          <a:p>
+            <a:pPr>
+              <a:lnSpc>
+                <a:spcPts val="2200"/>
+              </a:lnSpc>
+              <a:spcAft>
+                <a:spcPts val="400"/>
+              </a:spcAft>
+            </a:pPr>
+            <a:r>
+              <a:rPr sz="2000" b="0">
+                <a:solidFill>
+                  <a:srgbClr val="333333"/>
+                </a:solidFill>
+                <a:latin typeface="Consolas"/>
+              </a:rPr>
+              <a:t>  inv={u1/Y,u2/A,u2/Y,out}; A[out]=4.0</a:t>
+            </a:r>
+          </a:p>
+        </p:txBody>
+      </p:sp>
+      <p:sp>
+        <p:nvSpPr>
+          <p:cNvPr id="4" name="TextBox 3"/>
+          <p:cNvSpPr txBox="1"/>
+          <p:nvPr/>
+        </p:nvSpPr>
+        <p:spPr>
+          <a:xfrm>
+            <a:off x="548640" y="6355080"/>
+            <a:ext cx="11064240" cy="320040"/>
+          </a:xfrm>
+          <a:prstGeom prst="rect">
+            <a:avLst/>
+          </a:prstGeom>
+          <a:noFill/>
+        </p:spPr>
+        <p:txBody>
+          <a:bodyPr wrap="square">
+            <a:noAutofit/>
+          </a:bodyPr>
+          <a:lstStyle/>
+          <a:p>
+            <a:pPr algn="r">
+              <a:lnSpc>
+                <a:spcPts val="2200"/>
+              </a:lnSpc>
+              <a:defRPr sz="1000" b="0">
+                <a:solidFill>
+                  <a:srgbClr val="666666"/>
+                </a:solidFill>
+                <a:latin typeface="Calibri"/>
+              </a:defRPr>
+            </a:pPr>
+            <a:r>
+              <a:t>learn_sta — 01 incremental update</a:t>
+            </a:r>
+          </a:p>
+        </p:txBody>
+      </p:sp>
+    </p:spTree>
+  </p:cSld>
+  <p:clrMapOvr>
+    <a:masterClrMapping/>
+  </p:clrMapOvr>
+</p:sld>
+</file>
+
+<file path=ppt/slides/slide6.xml><?xml version="1.0" encoding="utf-8"?>
 <p:sld xmlns:a="http://schemas.openxmlformats.org/drawingml/2006/main" xmlns:p="http://schemas.openxmlformats.org/presentationml/2006/main" xmlns:r="http://schemas.openxmlformats.org/officeDocument/2006/relationships">
   <p:cSld>
     <p:spTree>
@@ -5074,7 +6370,7 @@
 </p:sld>
 </file>
 
-<file path=ppt/slides/slide4.xml><?xml version="1.0" encoding="utf-8"?>
+<file path=ppt/slides/slide7.xml><?xml version="1.0" encoding="utf-8"?>
 <p:sld xmlns:a="http://schemas.openxmlformats.org/drawingml/2006/main" xmlns:p="http://schemas.openxmlformats.org/presentationml/2006/main" xmlns:r="http://schemas.openxmlformats.org/officeDocument/2006/relationships">
   <p:cSld>
     <p:spTree>
@@ -5233,7 +6529,7 @@
 </p:sld>
 </file>
 
-<file path=ppt/slides/slide5.xml><?xml version="1.0" encoding="utf-8"?>
+<file path=ppt/slides/slide8.xml><?xml version="1.0" encoding="utf-8"?>
 <p:sld xmlns:a="http://schemas.openxmlformats.org/drawingml/2006/main" xmlns:p="http://schemas.openxmlformats.org/presentationml/2006/main" xmlns:r="http://schemas.openxmlformats.org/officeDocument/2006/relationships">
   <p:cSld>
     <p:spTree>
@@ -5392,7 +6688,7 @@
 </p:sld>
 </file>
 
-<file path=ppt/slides/slide6.xml><?xml version="1.0" encoding="utf-8"?>
+<file path=ppt/slides/slide9.xml><?xml version="1.0" encoding="utf-8"?>
 <p:sld xmlns:a="http://schemas.openxmlformats.org/drawingml/2006/main" xmlns:p="http://schemas.openxmlformats.org/presentationml/2006/main" xmlns:r="http://schemas.openxmlformats.org/officeDocument/2006/relationships">
   <p:cSld>
     <p:spTree>
@@ -5507,522 +6803,6 @@
       <p:sp>
         <p:nvSpPr>
           <p:cNvPr id="5" name="TextBox 4"/>
-          <p:cNvSpPr txBox="1"/>
-          <p:nvPr/>
-        </p:nvSpPr>
-        <p:spPr>
-          <a:xfrm>
-            <a:off x="548640" y="6355080"/>
-            <a:ext cx="11064240" cy="320040"/>
-          </a:xfrm>
-          <a:prstGeom prst="rect">
-            <a:avLst/>
-          </a:prstGeom>
-          <a:noFill/>
-        </p:spPr>
-        <p:txBody>
-          <a:bodyPr wrap="square">
-            <a:noAutofit/>
-          </a:bodyPr>
-          <a:lstStyle/>
-          <a:p>
-            <a:pPr algn="r">
-              <a:lnSpc>
-                <a:spcPts val="2200"/>
-              </a:lnSpc>
-              <a:defRPr sz="1000" b="0">
-                <a:solidFill>
-                  <a:srgbClr val="666666"/>
-                </a:solidFill>
-                <a:latin typeface="Calibri"/>
-              </a:defRPr>
-            </a:pPr>
-            <a:r>
-              <a:t>learn_sta — 01 incremental update</a:t>
-            </a:r>
-          </a:p>
-        </p:txBody>
-      </p:sp>
-    </p:spTree>
-  </p:cSld>
-  <p:clrMapOvr>
-    <a:masterClrMapping/>
-  </p:clrMapOvr>
-</p:sld>
-</file>
-
-<file path=ppt/slides/slide7.xml><?xml version="1.0" encoding="utf-8"?>
-<p:sld xmlns:a="http://schemas.openxmlformats.org/drawingml/2006/main" xmlns:p="http://schemas.openxmlformats.org/presentationml/2006/main" xmlns:r="http://schemas.openxmlformats.org/officeDocument/2006/relationships">
-  <p:cSld>
-    <p:spTree>
-      <p:nvGrpSpPr>
-        <p:cNvPr id="1" name=""/>
-        <p:cNvGrpSpPr/>
-        <p:nvPr/>
-      </p:nvGrpSpPr>
-      <p:grpSpPr/>
-      <p:sp>
-        <p:nvSpPr>
-          <p:cNvPr id="2" name="TextBox 1"/>
-          <p:cNvSpPr txBox="1"/>
-          <p:nvPr/>
-        </p:nvSpPr>
-        <p:spPr>
-          <a:xfrm>
-            <a:off x="548640" y="411480"/>
-            <a:ext cx="11064240" cy="777240"/>
-          </a:xfrm>
-          <a:prstGeom prst="rect">
-            <a:avLst/>
-          </a:prstGeom>
-          <a:noFill/>
-        </p:spPr>
-        <p:txBody>
-          <a:bodyPr wrap="square">
-            <a:noAutofit/>
-          </a:bodyPr>
-          <a:lstStyle/>
-          <a:p>
-            <a:pPr>
-              <a:lnSpc>
-                <a:spcPts val="2200"/>
-              </a:lnSpc>
-            </a:pPr>
-            <a:r>
-              <a:rPr sz="2800" b="1">
-                <a:solidFill>
-                  <a:srgbClr val="1A1A2E"/>
-                </a:solidFill>
-                <a:latin typeface="Calibri"/>
-              </a:rPr>
-              <a:t>Why timers insist on incremental</a:t>
-            </a:r>
-          </a:p>
-        </p:txBody>
-      </p:sp>
-      <p:pic>
-        <p:nvPicPr>
-          <p:cNvPr id="3" name="Picture 2" descr="05-why-incremental.png"/>
-          <p:cNvPicPr>
-            <a:picLocks noChangeAspect="1"/>
-          </p:cNvPicPr>
-          <p:nvPr/>
-        </p:nvPicPr>
-        <p:blipFill>
-          <a:blip r:embed="rId2"/>
-          <a:stretch>
-            <a:fillRect/>
-          </a:stretch>
-        </p:blipFill>
-        <p:spPr>
-          <a:xfrm>
-            <a:off x="548640" y="1143000"/>
-            <a:ext cx="9404113" cy="4572000"/>
-          </a:xfrm>
-          <a:prstGeom prst="rect">
-            <a:avLst/>
-          </a:prstGeom>
-        </p:spPr>
-      </p:pic>
-      <p:sp>
-        <p:nvSpPr>
-          <p:cNvPr id="4" name="TextBox 3"/>
-          <p:cNvSpPr txBox="1"/>
-          <p:nvPr/>
-        </p:nvSpPr>
-        <p:spPr>
-          <a:xfrm>
-            <a:off x="548640" y="5897880"/>
-            <a:ext cx="11064240" cy="411480"/>
-          </a:xfrm>
-          <a:prstGeom prst="rect">
-            <a:avLst/>
-          </a:prstGeom>
-          <a:noFill/>
-        </p:spPr>
-        <p:txBody>
-          <a:bodyPr wrap="square">
-            <a:noAutofit/>
-          </a:bodyPr>
-          <a:lstStyle/>
-          <a:p>
-            <a:pPr>
-              <a:lnSpc>
-                <a:spcPts val="2200"/>
-              </a:lnSpc>
-            </a:pPr>
-            <a:r>
-              <a:rPr sz="1200" b="0">
-                <a:solidFill>
-                  <a:srgbClr val="333333"/>
-                </a:solidFill>
-                <a:latin typeface="Calibri"/>
-              </a:rPr>
-              <a:t>Why timers insist on incremental</a:t>
-            </a:r>
-          </a:p>
-        </p:txBody>
-      </p:sp>
-      <p:sp>
-        <p:nvSpPr>
-          <p:cNvPr id="5" name="TextBox 4"/>
-          <p:cNvSpPr txBox="1"/>
-          <p:nvPr/>
-        </p:nvSpPr>
-        <p:spPr>
-          <a:xfrm>
-            <a:off x="548640" y="6355080"/>
-            <a:ext cx="11064240" cy="320040"/>
-          </a:xfrm>
-          <a:prstGeom prst="rect">
-            <a:avLst/>
-          </a:prstGeom>
-          <a:noFill/>
-        </p:spPr>
-        <p:txBody>
-          <a:bodyPr wrap="square">
-            <a:noAutofit/>
-          </a:bodyPr>
-          <a:lstStyle/>
-          <a:p>
-            <a:pPr algn="r">
-              <a:lnSpc>
-                <a:spcPts val="2200"/>
-              </a:lnSpc>
-              <a:defRPr sz="1000" b="0">
-                <a:solidFill>
-                  <a:srgbClr val="666666"/>
-                </a:solidFill>
-                <a:latin typeface="Calibri"/>
-              </a:defRPr>
-            </a:pPr>
-            <a:r>
-              <a:t>learn_sta — 01 incremental update</a:t>
-            </a:r>
-          </a:p>
-        </p:txBody>
-      </p:sp>
-    </p:spTree>
-  </p:cSld>
-  <p:clrMapOvr>
-    <a:masterClrMapping/>
-  </p:clrMapOvr>
-</p:sld>
-</file>
-
-<file path=ppt/slides/slide8.xml><?xml version="1.0" encoding="utf-8"?>
-<p:sld xmlns:a="http://schemas.openxmlformats.org/drawingml/2006/main" xmlns:p="http://schemas.openxmlformats.org/presentationml/2006/main" xmlns:r="http://schemas.openxmlformats.org/officeDocument/2006/relationships">
-  <p:cSld>
-    <p:spTree>
-      <p:nvGrpSpPr>
-        <p:cNvPr id="1" name=""/>
-        <p:cNvGrpSpPr/>
-        <p:nvPr/>
-      </p:nvGrpSpPr>
-      <p:grpSpPr/>
-      <p:sp>
-        <p:nvSpPr>
-          <p:cNvPr id="2" name="TextBox 1"/>
-          <p:cNvSpPr txBox="1"/>
-          <p:nvPr/>
-        </p:nvSpPr>
-        <p:spPr>
-          <a:xfrm>
-            <a:off x="548640" y="411480"/>
-            <a:ext cx="11064240" cy="777240"/>
-          </a:xfrm>
-          <a:prstGeom prst="rect">
-            <a:avLst/>
-          </a:prstGeom>
-          <a:noFill/>
-        </p:spPr>
-        <p:txBody>
-          <a:bodyPr wrap="square">
-            <a:noAutofit/>
-          </a:bodyPr>
-          <a:lstStyle/>
-          <a:p>
-            <a:pPr>
-              <a:lnSpc>
-                <a:spcPts val="2200"/>
-              </a:lnSpc>
-            </a:pPr>
-            <a:r>
-              <a:rPr sz="2800" b="1">
-                <a:solidFill>
-                  <a:srgbClr val="1A1A2E"/>
-                </a:solidFill>
-                <a:latin typeface="Calibri"/>
-              </a:rPr>
-              <a:t>Browser lab track</a:t>
-            </a:r>
-          </a:p>
-        </p:txBody>
-      </p:sp>
-      <p:sp>
-        <p:nvSpPr>
-          <p:cNvPr id="3" name="TextBox 2"/>
-          <p:cNvSpPr txBox="1"/>
-          <p:nvPr/>
-        </p:nvSpPr>
-        <p:spPr>
-          <a:xfrm>
-            <a:off x="548640" y="1234440"/>
-            <a:ext cx="11064240" cy="4937760"/>
-          </a:xfrm>
-          <a:prstGeom prst="rect">
-            <a:avLst/>
-          </a:prstGeom>
-          <a:noFill/>
-        </p:spPr>
-        <p:txBody>
-          <a:bodyPr wrap="square">
-            <a:noAutofit/>
-          </a:bodyPr>
-          <a:lstStyle/>
-          <a:p>
-            <a:pPr lvl="0" marL="457200" indent="-228600">
-              <a:buFont typeface="Calibri"/>
-              <a:spcAft>
-                <a:spcPts val="1000"/>
-              </a:spcAft>
-              <a:buSzPct val="100000"/>
-              <a:buChar char="•"/>
-              <a:lnSpc>
-                <a:spcPts val="2200"/>
-              </a:lnSpc>
-            </a:pPr>
-            <a:r>
-              <a:rPr sz="2000" b="0">
-                <a:solidFill>
-                  <a:srgbClr val="333333"/>
-                </a:solidFill>
-                <a:latin typeface="Calibri"/>
-              </a:rPr>
-              <a:t>In the browser lab, open </a:t>
-            </a:r>
-            <a:r>
-              <a:rPr sz="2000" b="1">
-                <a:solidFill>
-                  <a:srgbClr val="333333"/>
-                </a:solidFill>
-                <a:latin typeface="Calibri"/>
-              </a:rPr>
-              <a:t>incremental-update</a:t>
-            </a:r>
-          </a:p>
-          <a:p>
-            <a:pPr lvl="0" marL="457200" indent="-228600">
-              <a:buFont typeface="Calibri"/>
-              <a:spcAft>
-                <a:spcPts val="1000"/>
-              </a:spcAft>
-              <a:buSzPct val="100000"/>
-              <a:buChar char="•"/>
-              <a:lnSpc>
-                <a:spcPts val="2200"/>
-              </a:lnSpc>
-            </a:pPr>
-            <a:r>
-              <a:rPr sz="2000" b="0">
-                <a:solidFill>
-                  <a:srgbClr val="333333"/>
-                </a:solidFill>
-                <a:latin typeface="Calibri"/>
-              </a:rPr>
-              <a:t>Load the starter, run the analysis once, and read the metrics panel</a:t>
-            </a:r>
-          </a:p>
-          <a:p>
-            <a:pPr lvl="0" marL="457200" indent="-228600">
-              <a:buFont typeface="Calibri"/>
-              <a:spcAft>
-                <a:spcPts val="1000"/>
-              </a:spcAft>
-              <a:buSzPct val="100000"/>
-              <a:buChar char="•"/>
-              <a:lnSpc>
-                <a:spcPts val="2200"/>
-              </a:lnSpc>
-            </a:pPr>
-            <a:r>
-              <a:rPr sz="2000" b="0">
-                <a:solidFill>
-                  <a:srgbClr val="333333"/>
-                </a:solidFill>
-                <a:latin typeface="Calibri"/>
-              </a:rPr>
-              <a:t>Orient yourself, challenge panel, canvas, Check, then mirror the same goldens in code</a:t>
-            </a:r>
-          </a:p>
-        </p:txBody>
-      </p:sp>
-      <p:sp>
-        <p:nvSpPr>
-          <p:cNvPr id="4" name="TextBox 3"/>
-          <p:cNvSpPr txBox="1"/>
-          <p:nvPr/>
-        </p:nvSpPr>
-        <p:spPr>
-          <a:xfrm>
-            <a:off x="548640" y="6355080"/>
-            <a:ext cx="11064240" cy="320040"/>
-          </a:xfrm>
-          <a:prstGeom prst="rect">
-            <a:avLst/>
-          </a:prstGeom>
-          <a:noFill/>
-        </p:spPr>
-        <p:txBody>
-          <a:bodyPr wrap="square">
-            <a:noAutofit/>
-          </a:bodyPr>
-          <a:lstStyle/>
-          <a:p>
-            <a:pPr algn="r">
-              <a:lnSpc>
-                <a:spcPts val="2200"/>
-              </a:lnSpc>
-              <a:defRPr sz="1000" b="0">
-                <a:solidFill>
-                  <a:srgbClr val="666666"/>
-                </a:solidFill>
-                <a:latin typeface="Calibri"/>
-              </a:defRPr>
-            </a:pPr>
-            <a:r>
-              <a:t>learn_sta — 01 incremental update</a:t>
-            </a:r>
-          </a:p>
-        </p:txBody>
-      </p:sp>
-    </p:spTree>
-  </p:cSld>
-  <p:clrMapOvr>
-    <a:masterClrMapping/>
-  </p:clrMapOvr>
-</p:sld>
-</file>
-
-<file path=ppt/slides/slide9.xml><?xml version="1.0" encoding="utf-8"?>
-<p:sld xmlns:a="http://schemas.openxmlformats.org/drawingml/2006/main" xmlns:p="http://schemas.openxmlformats.org/presentationml/2006/main" xmlns:r="http://schemas.openxmlformats.org/officeDocument/2006/relationships">
-  <p:cSld>
-    <p:spTree>
-      <p:nvGrpSpPr>
-        <p:cNvPr id="1" name=""/>
-        <p:cNvGrpSpPr/>
-        <p:nvPr/>
-      </p:nvGrpSpPr>
-      <p:grpSpPr/>
-      <p:sp>
-        <p:nvSpPr>
-          <p:cNvPr id="2" name="TextBox 1"/>
-          <p:cNvSpPr txBox="1"/>
-          <p:nvPr/>
-        </p:nvSpPr>
-        <p:spPr>
-          <a:xfrm>
-            <a:off x="548640" y="411480"/>
-            <a:ext cx="11064240" cy="777240"/>
-          </a:xfrm>
-          <a:prstGeom prst="rect">
-            <a:avLst/>
-          </a:prstGeom>
-          <a:noFill/>
-        </p:spPr>
-        <p:txBody>
-          <a:bodyPr wrap="square">
-            <a:noAutofit/>
-          </a:bodyPr>
-          <a:lstStyle/>
-          <a:p>
-            <a:pPr>
-              <a:lnSpc>
-                <a:spcPts val="2200"/>
-              </a:lnSpc>
-            </a:pPr>
-            <a:r>
-              <a:rPr sz="2800" b="1">
-                <a:solidFill>
-                  <a:srgbClr val="1A1A2E"/>
-                </a:solidFill>
-                <a:latin typeface="Calibri"/>
-              </a:rPr>
-              <a:t>Implement track</a:t>
-            </a:r>
-          </a:p>
-        </p:txBody>
-      </p:sp>
-      <p:sp>
-        <p:nvSpPr>
-          <p:cNvPr id="3" name="TextBox 2"/>
-          <p:cNvSpPr txBox="1"/>
-          <p:nvPr/>
-        </p:nvSpPr>
-        <p:spPr>
-          <a:xfrm>
-            <a:off x="548640" y="1234440"/>
-            <a:ext cx="11064240" cy="4937760"/>
-          </a:xfrm>
-          <a:prstGeom prst="rect">
-            <a:avLst/>
-          </a:prstGeom>
-          <a:noFill/>
-        </p:spPr>
-        <p:txBody>
-          <a:bodyPr wrap="square">
-            <a:noAutofit/>
-          </a:bodyPr>
-          <a:lstStyle/>
-          <a:p>
-            <a:pPr lvl="0" marL="457200" indent="-228600">
-              <a:buFont typeface="Calibri"/>
-              <a:spcAft>
-                <a:spcPts val="1000"/>
-              </a:spcAft>
-              <a:buSzPct val="100000"/>
-              <a:buChar char="•"/>
-              <a:lnSpc>
-                <a:spcPts val="2200"/>
-              </a:lnSpc>
-            </a:pPr>
-            <a:r>
-              <a:rPr sz="2000" b="0">
-                <a:solidFill>
-                  <a:srgbClr val="333333"/>
-                </a:solidFill>
-                <a:latin typeface="Calibri"/>
-              </a:rPr>
-              <a:t>In the implement track</a:t>
-            </a:r>
-          </a:p>
-          <a:p>
-            <a:pPr lvl="0" marL="457200" indent="-228600">
-              <a:buFont typeface="Calibri"/>
-              <a:spcAft>
-                <a:spcPts val="1000"/>
-              </a:spcAft>
-              <a:buSzPct val="100000"/>
-              <a:buChar char="•"/>
-              <a:lnSpc>
-                <a:spcPts val="2200"/>
-              </a:lnSpc>
-            </a:pPr>
-            <a:r>
-              <a:rPr sz="2000" b="0">
-                <a:solidFill>
-                  <a:srgbClr val="333333"/>
-                </a:solidFill>
-                <a:latin typeface="Calibri"/>
-              </a:rPr>
-              <a:t>Run `python3 common/test_propagate.py` (and the timing-graph test) until the goldens print</a:t>
-            </a:r>
-          </a:p>
-        </p:txBody>
-      </p:sp>
-      <p:sp>
-        <p:nvSpPr>
-          <p:cNvPr id="4" name="TextBox 3"/>
           <p:cNvSpPr txBox="1"/>
           <p:nvPr/>
         </p:nvSpPr>
